--- a/data/09_internal_training/training_3.pptx
+++ b/data/09_internal_training/training_3.pptx
@@ -3140,17 +3140,34 @@
           <a:p/>
           <a:p>
             <a:r>
-              <a:t>南康网络有限公司 是中国 消费科技 行业的重要企业之一。</a:t>
-            </a:r>
-          </a:p>
-          <a:p>
-            <a:r>
-              <a:t>根据华辰资本 投资策略部 的研究，该公司成立于 2012 年，</a:t>
-            </a:r>
-          </a:p>
-          <a:p>
-            <a:r>
-              <a:t>目前员工规模约 4254 人。公司近年来持续加大研发投入，</a:t>
+              <a:t>风险管理部认为，云计算 行业仍然面临若干</a:t>
+            </a:r>
+          </a:p>
+          <a:p>
+            <a:r>
+              <a:t>不确定性因素，包括技术迭代风险、政策变化、</a:t>
+            </a:r>
+          </a:p>
+          <a:p>
+            <a:r>
+              <a:t>以及市场竞争加剧等问题。</a:t>
+            </a:r>
+          </a:p>
+          <a:p/>
+          <a:p/>
+          <a:p>
+            <a:r>
+              <a:t>富罳网络有限公司 是中国 新能源 行业的重要企业之一。</a:t>
+            </a:r>
+          </a:p>
+          <a:p>
+            <a:r>
+              <a:t>根据华辰资本 投资委员会 的研究，该公司成立于 2019 年，</a:t>
+            </a:r>
+          </a:p>
+          <a:p>
+            <a:r>
+              <a:t>目前员工规模约 3621 人。公司近年来持续加大研发投入，</a:t>
             </a:r>
           </a:p>
           <a:p>
@@ -3162,29 +3179,12 @@
           <a:p/>
           <a:p>
             <a:r>
-              <a:t>根据内部财务模型测算，迪摩科技有限公司 在未来三年</a:t>
-            </a:r>
-          </a:p>
-          <a:p>
-            <a:r>
-              <a:t>收入复合增长率预计可达到 31% 左右。</a:t>
-            </a:r>
-          </a:p>
-          <a:p>
-            <a:r>
-              <a:t>该预测基于行业需求增长以及公司产能扩张计划。</a:t>
-            </a:r>
-          </a:p>
-          <a:p/>
-          <a:p/>
-          <a:p>
-            <a:r>
-              <a:t>根据内部财务模型测算，东方峻景传媒有限公司 在未来三年</a:t>
-            </a:r>
-          </a:p>
-          <a:p>
-            <a:r>
-              <a:t>收入复合增长率预计可达到 33% 左右。</a:t>
+              <a:t>根据内部财务模型测算，华成育卓传媒有限公司 在未来三年</a:t>
+            </a:r>
+          </a:p>
+          <a:p>
+            <a:r>
+              <a:t>收入复合增长率预计可达到 13% 左右。</a:t>
             </a:r>
           </a:p>
           <a:p>
@@ -3251,17 +3251,17 @@
           <a:p/>
           <a:p>
             <a:r>
-              <a:t>创联世纪科技有限公司 是中国 医疗科技 行业的重要企业之一。</a:t>
-            </a:r>
-          </a:p>
-          <a:p>
-            <a:r>
-              <a:t>根据华辰资本 投资委员会 的研究，该公司成立于 2008 年，</a:t>
-            </a:r>
-          </a:p>
-          <a:p>
-            <a:r>
-              <a:t>目前员工规模约 3688 人。公司近年来持续加大研发投入，</a:t>
+              <a:t>精芯信息有限公司 是中国 半导体 行业的重要企业之一。</a:t>
+            </a:r>
+          </a:p>
+          <a:p>
+            <a:r>
+              <a:t>根据华辰资本 投资委员会 的研究，该公司成立于 2019 年，</a:t>
+            </a:r>
+          </a:p>
+          <a:p>
+            <a:r>
+              <a:t>目前员工规模约 5163 人。公司近年来持续加大研发投入，</a:t>
             </a:r>
           </a:p>
           <a:p>
@@ -3273,12 +3273,12 @@
           <a:p/>
           <a:p>
             <a:r>
-              <a:t>根据内部财务模型测算，精芯信息有限公司 在未来三年</a:t>
-            </a:r>
-          </a:p>
-          <a:p>
-            <a:r>
-              <a:t>收入复合增长率预计可达到 14% 左右。</a:t>
+              <a:t>根据内部财务模型测算，雨林木风计算机科技有限公司 在未来三年</a:t>
+            </a:r>
+          </a:p>
+          <a:p>
+            <a:r>
+              <a:t>收入复合增长率预计可达到 31% 左右。</a:t>
             </a:r>
           </a:p>
           <a:p>
@@ -3290,12 +3290,12 @@
           <a:p/>
           <a:p>
             <a:r>
-              <a:t>根据内部财务模型测算，东方峻景网络有限公司 在未来三年</a:t>
-            </a:r>
-          </a:p>
-          <a:p>
-            <a:r>
-              <a:t>收入复合增长率预计可达到 25% 左右。</a:t>
+              <a:t>根据内部财务模型测算，华成育卓传媒有限公司 在未来三年</a:t>
+            </a:r>
+          </a:p>
+          <a:p>
+            <a:r>
+              <a:t>收入复合增长率预计可达到 12% 左右。</a:t>
             </a:r>
           </a:p>
           <a:p>
@@ -3362,17 +3362,34 @@
           <a:p/>
           <a:p>
             <a:r>
-              <a:t>飞利信科技有限公司 是中国 新能源 行业的重要企业之一。</a:t>
-            </a:r>
-          </a:p>
-          <a:p>
-            <a:r>
-              <a:t>根据华辰资本 投资策略部 的研究，该公司成立于 2005 年，</a:t>
-            </a:r>
-          </a:p>
-          <a:p>
-            <a:r>
-              <a:t>目前员工规模约 4433 人。公司近年来持续加大研发投入，</a:t>
+              <a:t>风险管理部认为，半导体 行业仍然面临若干</a:t>
+            </a:r>
+          </a:p>
+          <a:p>
+            <a:r>
+              <a:t>不确定性因素，包括技术迭代风险、政策变化、</a:t>
+            </a:r>
+          </a:p>
+          <a:p>
+            <a:r>
+              <a:t>以及市场竞争加剧等问题。</a:t>
+            </a:r>
+          </a:p>
+          <a:p/>
+          <a:p/>
+          <a:p>
+            <a:r>
+              <a:t>信诚致远网络有限公司 是中国 半导体 行业的重要企业之一。</a:t>
+            </a:r>
+          </a:p>
+          <a:p>
+            <a:r>
+              <a:t>根据华辰资本 资产配置委员会 的研究，该公司成立于 2015 年，</a:t>
+            </a:r>
+          </a:p>
+          <a:p>
+            <a:r>
+              <a:t>目前员工规模约 2901 人。公司近年来持续加大研发投入，</a:t>
             </a:r>
           </a:p>
           <a:p>
@@ -3384,34 +3401,17 @@
           <a:p/>
           <a:p>
             <a:r>
-              <a:t>根据内部财务模型测算，信诚致远传媒有限公司 在未来三年</a:t>
-            </a:r>
-          </a:p>
-          <a:p>
-            <a:r>
-              <a:t>收入复合增长率预计可达到 18% 左右。</a:t>
-            </a:r>
-          </a:p>
-          <a:p>
-            <a:r>
-              <a:t>该预测基于行业需求增长以及公司产能扩张计划。</a:t>
-            </a:r>
-          </a:p>
-          <a:p/>
-          <a:p/>
-          <a:p>
-            <a:r>
-              <a:t>从产业链角度看，新能源 行业主要由上游设备厂商、</a:t>
-            </a:r>
-          </a:p>
-          <a:p>
-            <a:r>
-              <a:t>中游平台企业以及下游应用厂商组成。</a:t>
-            </a:r>
-          </a:p>
-          <a:p>
-            <a:r>
-              <a:t>昊嘉网络有限公司 主要位于产业链的 中游 环节。</a:t>
+              <a:t>风险管理部认为，云计算 行业仍然面临若干</a:t>
+            </a:r>
+          </a:p>
+          <a:p>
+            <a:r>
+              <a:t>不确定性因素，包括技术迭代风险、政策变化、</a:t>
+            </a:r>
+          </a:p>
+          <a:p>
+            <a:r>
+              <a:t>以及市场竞争加剧等问题。</a:t>
             </a:r>
           </a:p>
           <a:p/>
@@ -3473,29 +3473,7 @@
           <a:p/>
           <a:p>
             <a:r>
-              <a:t>天益科技有限公司 是中国 半导体 行业的重要企业之一。</a:t>
-            </a:r>
-          </a:p>
-          <a:p>
-            <a:r>
-              <a:t>根据华辰资本 资产配置委员会 的研究，该公司成立于 2013 年，</a:t>
-            </a:r>
-          </a:p>
-          <a:p>
-            <a:r>
-              <a:t>目前员工规模约 750 人。公司近年来持续加大研发投入，</a:t>
-            </a:r>
-          </a:p>
-          <a:p>
-            <a:r>
-              <a:t>在核心技术方面形成了较强的竞争壁垒。</a:t>
-            </a:r>
-          </a:p>
-          <a:p/>
-          <a:p/>
-          <a:p>
-            <a:r>
-              <a:t>风险管理部认为，云计算 行业仍然面临若干</a:t>
+              <a:t>风险管理部认为，人工智能 行业仍然面临若干</a:t>
             </a:r>
           </a:p>
           <a:p>
@@ -3512,17 +3490,34 @@
           <a:p/>
           <a:p>
             <a:r>
-              <a:t>根据内部财务模型测算，天益科技有限公司 在未来三年</a:t>
-            </a:r>
-          </a:p>
-          <a:p>
-            <a:r>
-              <a:t>收入复合增长率预计可达到 13% 左右。</a:t>
+              <a:t>根据内部财务模型测算，联通时科传媒有限公司 在未来三年</a:t>
+            </a:r>
+          </a:p>
+          <a:p>
+            <a:r>
+              <a:t>收入复合增长率预计可达到 32% 左右。</a:t>
             </a:r>
           </a:p>
           <a:p>
             <a:r>
               <a:t>该预测基于行业需求增长以及公司产能扩张计划。</a:t>
+            </a:r>
+          </a:p>
+          <a:p/>
+          <a:p/>
+          <a:p>
+            <a:r>
+              <a:t>华辰资本旗下的 HC AI Innovation Fund 在最近的资产配置会议中</a:t>
+            </a:r>
+          </a:p>
+          <a:p>
+            <a:r>
+              <a:t>讨论了 半导体 行业的投资机会，并对 雨林木风计算机科技有限公司</a:t>
+            </a:r>
+          </a:p>
+          <a:p>
+            <a:r>
+              <a:t>进行了重点评估。</a:t>
             </a:r>
           </a:p>
           <a:p/>
@@ -3584,56 +3579,56 @@
           <a:p/>
           <a:p>
             <a:r>
-              <a:t>迪摩科技有限公司 是中国 人工智能 行业的重要企业之一。</a:t>
-            </a:r>
-          </a:p>
-          <a:p>
-            <a:r>
-              <a:t>根据华辰资本 资产配置委员会 的研究，该公司成立于 2017 年，</a:t>
-            </a:r>
-          </a:p>
-          <a:p>
-            <a:r>
-              <a:t>目前员工规模约 7554 人。公司近年来持续加大研发投入，</a:t>
+              <a:t>根据内部财务模型测算，通际名联网络有限公司 在未来三年</a:t>
+            </a:r>
+          </a:p>
+          <a:p>
+            <a:r>
+              <a:t>收入复合增长率预计可达到 30% 左右。</a:t>
+            </a:r>
+          </a:p>
+          <a:p>
+            <a:r>
+              <a:t>该预测基于行业需求增长以及公司产能扩张计划。</a:t>
+            </a:r>
+          </a:p>
+          <a:p/>
+          <a:p/>
+          <a:p>
+            <a:r>
+              <a:t>根据内部财务模型测算，惠派国际公司科技有限公司 在未来三年</a:t>
+            </a:r>
+          </a:p>
+          <a:p>
+            <a:r>
+              <a:t>收入复合增长率预计可达到 24% 左右。</a:t>
+            </a:r>
+          </a:p>
+          <a:p>
+            <a:r>
+              <a:t>该预测基于行业需求增长以及公司产能扩张计划。</a:t>
+            </a:r>
+          </a:p>
+          <a:p/>
+          <a:p/>
+          <a:p>
+            <a:r>
+              <a:t>联通时科传媒有限公司 是中国 消费科技 行业的重要企业之一。</a:t>
+            </a:r>
+          </a:p>
+          <a:p>
+            <a:r>
+              <a:t>根据华辰资本 资产配置委员会 的研究，该公司成立于 2014 年，</a:t>
+            </a:r>
+          </a:p>
+          <a:p>
+            <a:r>
+              <a:t>目前员工规模约 3667 人。公司近年来持续加大研发投入，</a:t>
             </a:r>
           </a:p>
           <a:p>
             <a:r>
               <a:t>在核心技术方面形成了较强的竞争壁垒。</a:t>
-            </a:r>
-          </a:p>
-          <a:p/>
-          <a:p/>
-          <a:p>
-            <a:r>
-              <a:t>华辰资本旗下的 HC Energy Transition Fund 在最近的资产配置会议中</a:t>
-            </a:r>
-          </a:p>
-          <a:p>
-            <a:r>
-              <a:t>讨论了 消费科技 行业的投资机会，并对 银嘉信息有限公司</a:t>
-            </a:r>
-          </a:p>
-          <a:p>
-            <a:r>
-              <a:t>进行了重点评估。</a:t>
-            </a:r>
-          </a:p>
-          <a:p/>
-          <a:p/>
-          <a:p>
-            <a:r>
-              <a:t>从产业链角度看，云计算 行业主要由上游设备厂商、</a:t>
-            </a:r>
-          </a:p>
-          <a:p>
-            <a:r>
-              <a:t>中游平台企业以及下游应用厂商组成。</a:t>
-            </a:r>
-          </a:p>
-          <a:p>
-            <a:r>
-              <a:t>精芯科技有限公司 主要位于产业链的 下游 环节。</a:t>
             </a:r>
           </a:p>
           <a:p/>
@@ -3695,7 +3690,41 @@
           <a:p/>
           <a:p>
             <a:r>
-              <a:t>风险管理部认为，人工智能 行业仍然面临若干</a:t>
+              <a:t>华辰资本旗下的 HC Global Macro Fund 在最近的资产配置会议中</a:t>
+            </a:r>
+          </a:p>
+          <a:p>
+            <a:r>
+              <a:t>讨论了 半导体 行业的投资机会，并对 信诚致远网络有限公司</a:t>
+            </a:r>
+          </a:p>
+          <a:p>
+            <a:r>
+              <a:t>进行了重点评估。</a:t>
+            </a:r>
+          </a:p>
+          <a:p/>
+          <a:p/>
+          <a:p>
+            <a:r>
+              <a:t>根据内部财务模型测算，鑫博腾飞信息有限公司 在未来三年</a:t>
+            </a:r>
+          </a:p>
+          <a:p>
+            <a:r>
+              <a:t>收入复合增长率预计可达到 34% 左右。</a:t>
+            </a:r>
+          </a:p>
+          <a:p>
+            <a:r>
+              <a:t>该预测基于行业需求增长以及公司产能扩张计划。</a:t>
+            </a:r>
+          </a:p>
+          <a:p/>
+          <a:p/>
+          <a:p>
+            <a:r>
+              <a:t>风险管理部认为，机器人 行业仍然面临若干</a:t>
             </a:r>
           </a:p>
           <a:p>
@@ -3706,40 +3735,6 @@
           <a:p>
             <a:r>
               <a:t>以及市场竞争加剧等问题。</a:t>
-            </a:r>
-          </a:p>
-          <a:p/>
-          <a:p/>
-          <a:p>
-            <a:r>
-              <a:t>根据内部财务模型测算，佳禾科技有限公司 在未来三年</a:t>
-            </a:r>
-          </a:p>
-          <a:p>
-            <a:r>
-              <a:t>收入复合增长率预计可达到 16% 左右。</a:t>
-            </a:r>
-          </a:p>
-          <a:p>
-            <a:r>
-              <a:t>该预测基于行业需求增长以及公司产能扩张计划。</a:t>
-            </a:r>
-          </a:p>
-          <a:p/>
-          <a:p/>
-          <a:p>
-            <a:r>
-              <a:t>从产业链角度看，云计算 行业主要由上游设备厂商、</a:t>
-            </a:r>
-          </a:p>
-          <a:p>
-            <a:r>
-              <a:t>中游平台企业以及下游应用厂商组成。</a:t>
-            </a:r>
-          </a:p>
-          <a:p>
-            <a:r>
-              <a:t>立信电子网络有限公司 主要位于产业链的 上游 环节。</a:t>
             </a:r>
           </a:p>
           <a:p/>
@@ -3801,56 +3796,56 @@
           <a:p/>
           <a:p>
             <a:r>
-              <a:t>根据内部财务模型测算，富罳信息有限公司 在未来三年</a:t>
-            </a:r>
-          </a:p>
-          <a:p>
-            <a:r>
-              <a:t>收入复合增长率预计可达到 24% 左右。</a:t>
+              <a:t>从产业链角度看，机器人 行业主要由上游设备厂商、</a:t>
+            </a:r>
+          </a:p>
+          <a:p>
+            <a:r>
+              <a:t>中游平台企业以及下游应用厂商组成。</a:t>
+            </a:r>
+          </a:p>
+          <a:p>
+            <a:r>
+              <a:t>图龙信息传媒有限公司 主要位于产业链的 中游 环节。</a:t>
+            </a:r>
+          </a:p>
+          <a:p/>
+          <a:p/>
+          <a:p>
+            <a:r>
+              <a:t>信诚致远网络有限公司 是中国 半导体 行业的重要企业之一。</a:t>
+            </a:r>
+          </a:p>
+          <a:p>
+            <a:r>
+              <a:t>根据华辰资本 投资委员会 的研究，该公司成立于 2015 年，</a:t>
+            </a:r>
+          </a:p>
+          <a:p>
+            <a:r>
+              <a:t>目前员工规模约 2901 人。公司近年来持续加大研发投入，</a:t>
+            </a:r>
+          </a:p>
+          <a:p>
+            <a:r>
+              <a:t>在核心技术方面形成了较强的竞争壁垒。</a:t>
+            </a:r>
+          </a:p>
+          <a:p/>
+          <a:p/>
+          <a:p>
+            <a:r>
+              <a:t>根据内部财务模型测算，信诚致远网络有限公司 在未来三年</a:t>
+            </a:r>
+          </a:p>
+          <a:p>
+            <a:r>
+              <a:t>收入复合增长率预计可达到 28% 左右。</a:t>
             </a:r>
           </a:p>
           <a:p>
             <a:r>
               <a:t>该预测基于行业需求增长以及公司产能扩张计划。</a:t>
-            </a:r>
-          </a:p>
-          <a:p/>
-          <a:p/>
-          <a:p>
-            <a:r>
-              <a:t>华辰资本旗下的 HC Global Macro Fund 在最近的资产配置会议中</a:t>
-            </a:r>
-          </a:p>
-          <a:p>
-            <a:r>
-              <a:t>讨论了 云计算 行业的投资机会，并对 创亿网络有限公司</a:t>
-            </a:r>
-          </a:p>
-          <a:p>
-            <a:r>
-              <a:t>进行了重点评估。</a:t>
-            </a:r>
-          </a:p>
-          <a:p/>
-          <a:p/>
-          <a:p>
-            <a:r>
-              <a:t>鸿睿思博信息有限公司 是中国 半导体 行业的重要企业之一。</a:t>
-            </a:r>
-          </a:p>
-          <a:p>
-            <a:r>
-              <a:t>根据华辰资本 量化研究部 的研究，该公司成立于 2015 年，</a:t>
-            </a:r>
-          </a:p>
-          <a:p>
-            <a:r>
-              <a:t>目前员工规模约 1207 人。公司近年来持续加大研发投入，</a:t>
-            </a:r>
-          </a:p>
-          <a:p>
-            <a:r>
-              <a:t>在核心技术方面形成了较强的竞争壁垒。</a:t>
             </a:r>
           </a:p>
           <a:p/>
@@ -3912,17 +3907,17 @@
           <a:p/>
           <a:p>
             <a:r>
-              <a:t>风险管理部认为，云计算 行业仍然面临若干</a:t>
-            </a:r>
-          </a:p>
-          <a:p>
-            <a:r>
-              <a:t>不确定性因素，包括技术迭代风险、政策变化、</a:t>
-            </a:r>
-          </a:p>
-          <a:p>
-            <a:r>
-              <a:t>以及市场竞争加剧等问题。</a:t>
+              <a:t>从产业链角度看，新能源 行业主要由上游设备厂商、</a:t>
+            </a:r>
+          </a:p>
+          <a:p>
+            <a:r>
+              <a:t>中游平台企业以及下游应用厂商组成。</a:t>
+            </a:r>
+          </a:p>
+          <a:p>
+            <a:r>
+              <a:t>戴硕电子网络有限公司 主要位于产业链的 下游 环节。</a:t>
             </a:r>
           </a:p>
           <a:p/>
@@ -3934,7 +3929,7 @@
           </a:p>
           <a:p>
             <a:r>
-              <a:t>讨论了 消费科技 行业的投资机会，并对 昂歌信息科技有限公司</a:t>
+              <a:t>讨论了 人工智能 行业的投资机会，并对 飞利信科技有限公司</a:t>
             </a:r>
           </a:p>
           <a:p>
@@ -3946,17 +3941,17 @@
           <a:p/>
           <a:p>
             <a:r>
-              <a:t>从产业链角度看，半导体 行业主要由上游设备厂商、</a:t>
-            </a:r>
-          </a:p>
-          <a:p>
-            <a:r>
-              <a:t>中游平台企业以及下游应用厂商组成。</a:t>
-            </a:r>
-          </a:p>
-          <a:p>
-            <a:r>
-              <a:t>万迅电脑网络有限公司 主要位于产业链的 上游 环节。</a:t>
+              <a:t>华辰资本旗下的 HC Quant Arbitrage Fund 在最近的资产配置会议中</a:t>
+            </a:r>
+          </a:p>
+          <a:p>
+            <a:r>
+              <a:t>讨论了 人工智能 行业的投资机会，并对 新格林耐特网络有限公司</a:t>
+            </a:r>
+          </a:p>
+          <a:p>
+            <a:r>
+              <a:t>进行了重点评估。</a:t>
             </a:r>
           </a:p>
           <a:p/>
@@ -4018,56 +4013,51 @@
           <a:p/>
           <a:p>
             <a:r>
-              <a:t>创联世纪科技有限公司 是中国 医疗科技 行业的重要企业之一。</a:t>
-            </a:r>
-          </a:p>
-          <a:p>
-            <a:r>
-              <a:t>根据华辰资本 资产配置委员会 的研究，该公司成立于 2008 年，</a:t>
-            </a:r>
-          </a:p>
-          <a:p>
-            <a:r>
-              <a:t>目前员工规模约 3688 人。公司近年来持续加大研发投入，</a:t>
-            </a:r>
-          </a:p>
-          <a:p>
-            <a:r>
-              <a:t>在核心技术方面形成了较强的竞争壁垒。</a:t>
-            </a:r>
-          </a:p>
-          <a:p/>
-          <a:p/>
-          <a:p>
-            <a:r>
-              <a:t>根据内部财务模型测算，昂歌信息科技有限公司 在未来三年</a:t>
-            </a:r>
-          </a:p>
-          <a:p>
-            <a:r>
-              <a:t>收入复合增长率预计可达到 18% 左右。</a:t>
-            </a:r>
-          </a:p>
-          <a:p>
-            <a:r>
-              <a:t>该预测基于行业需求增长以及公司产能扩张计划。</a:t>
-            </a:r>
-          </a:p>
-          <a:p/>
-          <a:p/>
-          <a:p>
-            <a:r>
-              <a:t>风险管理部认为，新能源 行业仍然面临若干</a:t>
-            </a:r>
-          </a:p>
-          <a:p>
-            <a:r>
-              <a:t>不确定性因素，包括技术迭代风险、政策变化、</a:t>
-            </a:r>
-          </a:p>
-          <a:p>
-            <a:r>
-              <a:t>以及市场竞争加剧等问题。</a:t>
+              <a:t>华辰资本旗下的 HC AI Innovation Fund 在最近的资产配置会议中</a:t>
+            </a:r>
+          </a:p>
+          <a:p>
+            <a:r>
+              <a:t>讨论了 机器人 行业的投资机会，并对 图龙信息传媒有限公司</a:t>
+            </a:r>
+          </a:p>
+          <a:p>
+            <a:r>
+              <a:t>进行了重点评估。</a:t>
+            </a:r>
+          </a:p>
+          <a:p/>
+          <a:p/>
+          <a:p>
+            <a:r>
+              <a:t>华辰资本旗下的 HC Energy Transition Fund 在最近的资产配置会议中</a:t>
+            </a:r>
+          </a:p>
+          <a:p>
+            <a:r>
+              <a:t>讨论了 消费科技 行业的投资机会，并对 鑫博腾飞信息有限公司</a:t>
+            </a:r>
+          </a:p>
+          <a:p>
+            <a:r>
+              <a:t>进行了重点评估。</a:t>
+            </a:r>
+          </a:p>
+          <a:p/>
+          <a:p/>
+          <a:p>
+            <a:r>
+              <a:t>从产业链角度看，半导体 行业主要由上游设备厂商、</a:t>
+            </a:r>
+          </a:p>
+          <a:p>
+            <a:r>
+              <a:t>中游平台企业以及下游应用厂商组成。</a:t>
+            </a:r>
+          </a:p>
+          <a:p>
+            <a:r>
+              <a:t>精芯信息有限公司 主要位于产业链的 中游 环节。</a:t>
             </a:r>
           </a:p>
           <a:p/>
@@ -4129,12 +4119,29 @@
           <a:p/>
           <a:p>
             <a:r>
-              <a:t>根据内部财务模型测算，昂歌信息科技有限公司 在未来三年</a:t>
-            </a:r>
-          </a:p>
-          <a:p>
-            <a:r>
-              <a:t>收入复合增长率预计可达到 18% 左右。</a:t>
+              <a:t>华辰资本旗下的 HC AI Innovation Fund 在最近的资产配置会议中</a:t>
+            </a:r>
+          </a:p>
+          <a:p>
+            <a:r>
+              <a:t>讨论了 半导体 行业的投资机会，并对 联软网络有限公司</a:t>
+            </a:r>
+          </a:p>
+          <a:p>
+            <a:r>
+              <a:t>进行了重点评估。</a:t>
+            </a:r>
+          </a:p>
+          <a:p/>
+          <a:p/>
+          <a:p>
+            <a:r>
+              <a:t>根据内部财务模型测算，新格林耐特网络有限公司 在未来三年</a:t>
+            </a:r>
+          </a:p>
+          <a:p>
+            <a:r>
+              <a:t>收入复合增长率预计可达到 26% 左右。</a:t>
             </a:r>
           </a:p>
           <a:p>
@@ -4146,7 +4153,7 @@
           <a:p/>
           <a:p>
             <a:r>
-              <a:t>从产业链角度看，半导体 行业主要由上游设备厂商、</a:t>
+              <a:t>从产业链角度看，消费科技 行业主要由上游设备厂商、</a:t>
             </a:r>
           </a:p>
           <a:p>
@@ -4156,24 +4163,7 @@
           </a:p>
           <a:p>
             <a:r>
-              <a:t>华远软件信息有限公司 主要位于产业链的 下游 环节。</a:t>
-            </a:r>
-          </a:p>
-          <a:p/>
-          <a:p/>
-          <a:p>
-            <a:r>
-              <a:t>华辰资本旗下的 HC Quant Arbitrage Fund 在最近的资产配置会议中</a:t>
-            </a:r>
-          </a:p>
-          <a:p>
-            <a:r>
-              <a:t>讨论了 医疗科技 行业的投资机会，并对 雨林木风计算机网络有限公司</a:t>
-            </a:r>
-          </a:p>
-          <a:p>
-            <a:r>
-              <a:t>进行了重点评估。</a:t>
+              <a:t>方正科技信息有限公司 主要位于产业链的 下游 环节。</a:t>
             </a:r>
           </a:p>
           <a:p/>
@@ -4235,51 +4225,66 @@
           <a:p/>
           <a:p>
             <a:r>
-              <a:t>根据内部财务模型测算，飞利信科技有限公司 在未来三年</a:t>
-            </a:r>
-          </a:p>
-          <a:p>
-            <a:r>
-              <a:t>收入复合增长率预计可达到 10% 左右。</a:t>
-            </a:r>
-          </a:p>
-          <a:p>
-            <a:r>
-              <a:t>该预测基于行业需求增长以及公司产能扩张计划。</a:t>
-            </a:r>
-          </a:p>
-          <a:p/>
-          <a:p/>
-          <a:p>
-            <a:r>
-              <a:t>华辰资本旗下的 HC Energy Transition Fund 在最近的资产配置会议中</a:t>
-            </a:r>
-          </a:p>
-          <a:p>
-            <a:r>
-              <a:t>讨论了 新能源 行业的投资机会，并对 东方峻景传媒有限公司</a:t>
-            </a:r>
-          </a:p>
-          <a:p>
-            <a:r>
-              <a:t>进行了重点评估。</a:t>
-            </a:r>
-          </a:p>
-          <a:p/>
-          <a:p/>
-          <a:p>
-            <a:r>
-              <a:t>风险管理部认为，消费科技 行业仍然面临若干</a:t>
-            </a:r>
-          </a:p>
-          <a:p>
-            <a:r>
-              <a:t>不确定性因素，包括技术迭代风险、政策变化、</a:t>
-            </a:r>
-          </a:p>
-          <a:p>
-            <a:r>
-              <a:t>以及市场竞争加剧等问题。</a:t>
+              <a:t>鑫博腾飞信息有限公司 是中国 消费科技 行业的重要企业之一。</a:t>
+            </a:r>
+          </a:p>
+          <a:p>
+            <a:r>
+              <a:t>根据华辰资本 风险管理部 的研究，该公司成立于 2016 年，</a:t>
+            </a:r>
+          </a:p>
+          <a:p>
+            <a:r>
+              <a:t>目前员工规模约 4167 人。公司近年来持续加大研发投入，</a:t>
+            </a:r>
+          </a:p>
+          <a:p>
+            <a:r>
+              <a:t>在核心技术方面形成了较强的竞争壁垒。</a:t>
+            </a:r>
+          </a:p>
+          <a:p/>
+          <a:p/>
+          <a:p>
+            <a:r>
+              <a:t>中建创业科技有限公司 是中国 半导体 行业的重要企业之一。</a:t>
+            </a:r>
+          </a:p>
+          <a:p>
+            <a:r>
+              <a:t>根据华辰资本 资产配置委员会 的研究，该公司成立于 2006 年，</a:t>
+            </a:r>
+          </a:p>
+          <a:p>
+            <a:r>
+              <a:t>目前员工规模约 6832 人。公司近年来持续加大研发投入，</a:t>
+            </a:r>
+          </a:p>
+          <a:p>
+            <a:r>
+              <a:t>在核心技术方面形成了较强的竞争壁垒。</a:t>
+            </a:r>
+          </a:p>
+          <a:p/>
+          <a:p/>
+          <a:p>
+            <a:r>
+              <a:t>飞海科技传媒有限公司 是中国 消费科技 行业的重要企业之一。</a:t>
+            </a:r>
+          </a:p>
+          <a:p>
+            <a:r>
+              <a:t>根据华辰资本 资产配置委员会 的研究，该公司成立于 2016 年，</a:t>
+            </a:r>
+          </a:p>
+          <a:p>
+            <a:r>
+              <a:t>目前员工规模约 2007 人。公司近年来持续加大研发投入，</a:t>
+            </a:r>
+          </a:p>
+          <a:p>
+            <a:r>
+              <a:t>在核心技术方面形成了较强的竞争壁垒。</a:t>
             </a:r>
           </a:p>
           <a:p/>
@@ -4341,12 +4346,29 @@
           <a:p/>
           <a:p>
             <a:r>
-              <a:t>华辰资本旗下的 HC Alpha Growth Fund 在最近的资产配置会议中</a:t>
-            </a:r>
-          </a:p>
-          <a:p>
-            <a:r>
-              <a:t>讨论了 新能源 行业的投资机会，并对 飞利信科技有限公司</a:t>
+              <a:t>根据内部财务模型测算，惠派国际公司科技有限公司 在未来三年</a:t>
+            </a:r>
+          </a:p>
+          <a:p>
+            <a:r>
+              <a:t>收入复合增长率预计可达到 27% 左右。</a:t>
+            </a:r>
+          </a:p>
+          <a:p>
+            <a:r>
+              <a:t>该预测基于行业需求增长以及公司产能扩张计划。</a:t>
+            </a:r>
+          </a:p>
+          <a:p/>
+          <a:p/>
+          <a:p>
+            <a:r>
+              <a:t>华辰资本旗下的 HC Energy Transition Fund 在最近的资产配置会议中</a:t>
+            </a:r>
+          </a:p>
+          <a:p>
+            <a:r>
+              <a:t>讨论了 人工智能 行业的投资机会，并对 明腾传媒有限公司</a:t>
             </a:r>
           </a:p>
           <a:p>
@@ -4358,34 +4380,17 @@
           <a:p/>
           <a:p>
             <a:r>
-              <a:t>风险管理部认为，新能源 行业仍然面临若干</a:t>
-            </a:r>
-          </a:p>
-          <a:p>
-            <a:r>
-              <a:t>不确定性因素，包括技术迭代风险、政策变化、</a:t>
-            </a:r>
-          </a:p>
-          <a:p>
-            <a:r>
-              <a:t>以及市场竞争加剧等问题。</a:t>
-            </a:r>
-          </a:p>
-          <a:p/>
-          <a:p/>
-          <a:p>
-            <a:r>
-              <a:t>风险管理部认为，机器人 行业仍然面临若干</a:t>
-            </a:r>
-          </a:p>
-          <a:p>
-            <a:r>
-              <a:t>不确定性因素，包括技术迭代风险、政策变化、</a:t>
-            </a:r>
-          </a:p>
-          <a:p>
-            <a:r>
-              <a:t>以及市场竞争加剧等问题。</a:t>
+              <a:t>根据内部财务模型测算，毕博诚信息有限公司 在未来三年</a:t>
+            </a:r>
+          </a:p>
+          <a:p>
+            <a:r>
+              <a:t>收入复合增长率预计可达到 35% 左右。</a:t>
+            </a:r>
+          </a:p>
+          <a:p>
+            <a:r>
+              <a:t>该预测基于行业需求增长以及公司产能扩张计划。</a:t>
             </a:r>
           </a:p>
           <a:p/>
@@ -4447,51 +4452,41 @@
           <a:p/>
           <a:p>
             <a:r>
-              <a:t>迪摩科技有限公司 是中国 人工智能 行业的重要企业之一。</a:t>
-            </a:r>
-          </a:p>
-          <a:p>
-            <a:r>
-              <a:t>根据华辰资本 资产配置委员会 的研究，该公司成立于 2017 年，</a:t>
-            </a:r>
-          </a:p>
-          <a:p>
-            <a:r>
-              <a:t>目前员工规模约 7554 人。公司近年来持续加大研发投入，</a:t>
-            </a:r>
-          </a:p>
-          <a:p>
-            <a:r>
-              <a:t>在核心技术方面形成了较强的竞争壁垒。</a:t>
-            </a:r>
-          </a:p>
-          <a:p/>
-          <a:p/>
-          <a:p>
-            <a:r>
-              <a:t>信诚致远传媒有限公司 是中国 人工智能 行业的重要企业之一。</a:t>
-            </a:r>
-          </a:p>
-          <a:p>
-            <a:r>
-              <a:t>根据华辰资本 投资策略部 的研究，该公司成立于 2015 年，</a:t>
-            </a:r>
-          </a:p>
-          <a:p>
-            <a:r>
-              <a:t>目前员工规模约 5674 人。公司近年来持续加大研发投入，</a:t>
-            </a:r>
-          </a:p>
-          <a:p>
-            <a:r>
-              <a:t>在核心技术方面形成了较强的竞争壁垒。</a:t>
-            </a:r>
-          </a:p>
-          <a:p/>
-          <a:p/>
-          <a:p>
-            <a:r>
-              <a:t>风险管理部认为，医疗科技 行业仍然面临若干</a:t>
+              <a:t>从产业链角度看，人工智能 行业主要由上游设备厂商、</a:t>
+            </a:r>
+          </a:p>
+          <a:p>
+            <a:r>
+              <a:t>中游平台企业以及下游应用厂商组成。</a:t>
+            </a:r>
+          </a:p>
+          <a:p>
+            <a:r>
+              <a:t>惠派国际公司科技有限公司 主要位于产业链的 下游 环节。</a:t>
+            </a:r>
+          </a:p>
+          <a:p/>
+          <a:p/>
+          <a:p>
+            <a:r>
+              <a:t>华辰资本旗下的 HC Global Macro Fund 在最近的资产配置会议中</a:t>
+            </a:r>
+          </a:p>
+          <a:p>
+            <a:r>
+              <a:t>讨论了 云计算 行业的投资机会，并对 佳禾传媒有限公司</a:t>
+            </a:r>
+          </a:p>
+          <a:p>
+            <a:r>
+              <a:t>进行了重点评估。</a:t>
+            </a:r>
+          </a:p>
+          <a:p/>
+          <a:p/>
+          <a:p>
+            <a:r>
+              <a:t>风险管理部认为，新能源 行业仍然面临若干</a:t>
             </a:r>
           </a:p>
           <a:p>
@@ -4563,12 +4558,29 @@
           <a:p/>
           <a:p>
             <a:r>
-              <a:t>根据内部财务模型测算，浦华众城科技有限公司 在未来三年</a:t>
-            </a:r>
-          </a:p>
-          <a:p>
-            <a:r>
-              <a:t>收入复合增长率预计可达到 23% 左右。</a:t>
+              <a:t>风险管理部认为，消费科技 行业仍然面临若干</a:t>
+            </a:r>
+          </a:p>
+          <a:p>
+            <a:r>
+              <a:t>不确定性因素，包括技术迭代风险、政策变化、</a:t>
+            </a:r>
+          </a:p>
+          <a:p>
+            <a:r>
+              <a:t>以及市场竞争加剧等问题。</a:t>
+            </a:r>
+          </a:p>
+          <a:p/>
+          <a:p/>
+          <a:p>
+            <a:r>
+              <a:t>根据内部财务模型测算，联通时科传媒有限公司 在未来三年</a:t>
+            </a:r>
+          </a:p>
+          <a:p>
+            <a:r>
+              <a:t>收入复合增长率预计可达到 25% 左右。</a:t>
             </a:r>
           </a:p>
           <a:p>
@@ -4580,39 +4592,22 @@
           <a:p/>
           <a:p>
             <a:r>
-              <a:t>国讯网络有限公司 是中国 云计算 行业的重要企业之一。</a:t>
-            </a:r>
-          </a:p>
-          <a:p>
-            <a:r>
-              <a:t>根据华辰资本 资产配置委员会 的研究，该公司成立于 2016 年，</a:t>
-            </a:r>
-          </a:p>
-          <a:p>
-            <a:r>
-              <a:t>目前员工规模约 6348 人。公司近年来持续加大研发投入，</a:t>
+              <a:t>方正科技传媒有限公司 是中国 人工智能 行业的重要企业之一。</a:t>
+            </a:r>
+          </a:p>
+          <a:p>
+            <a:r>
+              <a:t>根据华辰资本 风险管理部 的研究，该公司成立于 2019 年，</a:t>
+            </a:r>
+          </a:p>
+          <a:p>
+            <a:r>
+              <a:t>目前员工规模约 2043 人。公司近年来持续加大研发投入，</a:t>
             </a:r>
           </a:p>
           <a:p>
             <a:r>
               <a:t>在核心技术方面形成了较强的竞争壁垒。</a:t>
-            </a:r>
-          </a:p>
-          <a:p/>
-          <a:p/>
-          <a:p>
-            <a:r>
-              <a:t>根据内部财务模型测算，南康网络有限公司 在未来三年</a:t>
-            </a:r>
-          </a:p>
-          <a:p>
-            <a:r>
-              <a:t>收入复合增长率预计可达到 14% 左右。</a:t>
-            </a:r>
-          </a:p>
-          <a:p>
-            <a:r>
-              <a:t>该预测基于行业需求增长以及公司产能扩张计划。</a:t>
             </a:r>
           </a:p>
           <a:p/>
@@ -4674,34 +4669,34 @@
           <a:p/>
           <a:p>
             <a:r>
-              <a:t>风险管理部认为，新能源 行业仍然面临若干</a:t>
-            </a:r>
-          </a:p>
-          <a:p>
-            <a:r>
-              <a:t>不确定性因素，包括技术迭代风险、政策变化、</a:t>
-            </a:r>
-          </a:p>
-          <a:p>
-            <a:r>
-              <a:t>以及市场竞争加剧等问题。</a:t>
-            </a:r>
-          </a:p>
-          <a:p/>
-          <a:p/>
-          <a:p>
-            <a:r>
-              <a:t>东方峻景网络有限公司 是中国 机器人 行业的重要企业之一。</a:t>
-            </a:r>
-          </a:p>
-          <a:p>
-            <a:r>
-              <a:t>根据华辰资本 量化研究部 的研究，该公司成立于 2020 年，</a:t>
-            </a:r>
-          </a:p>
-          <a:p>
-            <a:r>
-              <a:t>目前员工规模约 7859 人。公司近年来持续加大研发投入，</a:t>
+              <a:t>华辰资本旗下的 HC AI Innovation Fund 在最近的资产配置会议中</a:t>
+            </a:r>
+          </a:p>
+          <a:p>
+            <a:r>
+              <a:t>讨论了 消费科技 行业的投资机会，并对 联软科技有限公司</a:t>
+            </a:r>
+          </a:p>
+          <a:p>
+            <a:r>
+              <a:t>进行了重点评估。</a:t>
+            </a:r>
+          </a:p>
+          <a:p/>
+          <a:p/>
+          <a:p>
+            <a:r>
+              <a:t>华成育卓传媒有限公司 是中国 人工智能 行业的重要企业之一。</a:t>
+            </a:r>
+          </a:p>
+          <a:p>
+            <a:r>
+              <a:t>根据华辰资本 投资委员会 的研究，该公司成立于 2006 年，</a:t>
+            </a:r>
+          </a:p>
+          <a:p>
+            <a:r>
+              <a:t>目前员工规模约 7579 人。公司近年来持续加大研发投入，</a:t>
             </a:r>
           </a:p>
           <a:p>
@@ -4713,17 +4708,17 @@
           <a:p/>
           <a:p>
             <a:r>
-              <a:t>从产业链角度看，新能源 行业主要由上游设备厂商、</a:t>
-            </a:r>
-          </a:p>
-          <a:p>
-            <a:r>
-              <a:t>中游平台企业以及下游应用厂商组成。</a:t>
-            </a:r>
-          </a:p>
-          <a:p>
-            <a:r>
-              <a:t>九方信息有限公司 主要位于产业链的 中游 环节。</a:t>
+              <a:t>根据内部财务模型测算，创汇传媒有限公司 在未来三年</a:t>
+            </a:r>
+          </a:p>
+          <a:p>
+            <a:r>
+              <a:t>收入复合增长率预计可达到 30% 左右。</a:t>
+            </a:r>
+          </a:p>
+          <a:p>
+            <a:r>
+              <a:t>该预测基于行业需求增长以及公司产能扩张计划。</a:t>
             </a:r>
           </a:p>
           <a:p/>
